--- a/参考资料/FPGA-ARM开发板简介.pptx
+++ b/参考资料/FPGA-ARM开发板简介.pptx
@@ -219,7 +219,7 @@
           <a:p>
             <a:fld id="{42376B2B-A27E-4AFC-A98B-D3A6A0E3C6A1}" type="datetimeFigureOut">
               <a:rPr lang="zh-CN" altLang="en-US" smtClean="0"/>
-              <a:t>2026/6/10</a:t>
+              <a:t>2026/6/27</a:t>
             </a:fld>
             <a:endParaRPr lang="zh-CN" altLang="en-US"/>
           </a:p>
@@ -1196,7 +1196,7 @@
           <a:p>
             <a:fld id="{46067C61-6345-4DF2-B1CF-14FB34CFBD5D}" type="datetimeFigureOut">
               <a:rPr lang="zh-CN" altLang="en-US" smtClean="0"/>
-              <a:t>2026/6/10</a:t>
+              <a:t>2026/6/27</a:t>
             </a:fld>
             <a:endParaRPr lang="zh-CN" altLang="en-US"/>
           </a:p>
@@ -1407,7 +1407,7 @@
           <a:p>
             <a:fld id="{46067C61-6345-4DF2-B1CF-14FB34CFBD5D}" type="datetimeFigureOut">
               <a:rPr lang="zh-CN" altLang="en-US" smtClean="0"/>
-              <a:t>2026/6/10</a:t>
+              <a:t>2026/6/27</a:t>
             </a:fld>
             <a:endParaRPr lang="zh-CN" altLang="en-US"/>
           </a:p>
@@ -2207,10 +2207,10 @@
       </p:sp>
       <p:pic>
         <p:nvPicPr>
-          <p:cNvPr id="4" name="图片 3">
+          <p:cNvPr id="5" name="图片 4">
             <a:extLst>
               <a:ext uri="{FF2B5EF4-FFF2-40B4-BE49-F238E27FC236}">
-                <a16:creationId xmlns:a16="http://schemas.microsoft.com/office/drawing/2014/main" id="{1AF2A689-A0CE-47BE-8DF8-D14CE9E72D4B}"/>
+                <a16:creationId xmlns:a16="http://schemas.microsoft.com/office/drawing/2014/main" id="{CFCD7493-A216-477E-A3E5-6C7C8604526D}"/>
               </a:ext>
             </a:extLst>
           </p:cNvPr>
@@ -2227,8 +2227,8 @@
         </p:blipFill>
         <p:spPr>
           <a:xfrm>
-            <a:off x="714120" y="1289540"/>
-            <a:ext cx="10763760" cy="4681713"/>
+            <a:off x="381245" y="945740"/>
+            <a:ext cx="11340850" cy="5290467"/>
           </a:xfrm>
           <a:prstGeom prst="rect">
             <a:avLst/>
@@ -5073,7 +5073,7 @@
         <p:spPr>
           <a:xfrm>
             <a:off x="797814" y="3244334"/>
-            <a:ext cx="8236458" cy="784830"/>
+            <a:ext cx="10211562" cy="784830"/>
           </a:xfrm>
           <a:prstGeom prst="rect">
             <a:avLst/>
@@ -5113,7 +5113,19 @@
             </a:r>
             <a:r>
               <a:rPr lang="zh-CN" altLang="en-US" dirty="0"/>
-              <a:t>文件，掉电即丢失配置</a:t>
+              <a:t>文件，掉电即丢失配置（也可以转</a:t>
+            </a:r>
+            <a:r>
+              <a:rPr lang="en-US" altLang="zh-CN" dirty="0"/>
+              <a:t>.</a:t>
+            </a:r>
+            <a:r>
+              <a:rPr lang="en-US" altLang="zh-CN" dirty="0" err="1"/>
+              <a:t>jic</a:t>
+            </a:r>
+            <a:r>
+              <a:rPr lang="zh-CN" altLang="en-US" dirty="0"/>
+              <a:t>文件烧录，但消耗额外逻辑）</a:t>
             </a:r>
             <a:endParaRPr lang="en-US" altLang="zh-CN" dirty="0"/>
           </a:p>
